--- a/Week_06/DExB2 lecture 11.pptx
+++ b/Week_06/DExB2 lecture 11.pptx
@@ -145,7 +145,7 @@
 <file path=ppt/revisionInfo.xml><?xml version="1.0" encoding="utf-8"?>
 <p1510:revInfo xmlns:a="http://schemas.openxmlformats.org/drawingml/2006/main" xmlns:r="http://schemas.openxmlformats.org/officeDocument/2006/relationships" xmlns:p1510="http://schemas.microsoft.com/office/powerpoint/2015/10/main">
   <p1510:revLst>
-    <p1510:client id="{BB74DF13-67F5-D058-BF2F-914909AD0E2F}" v="75" dt="2026-10-25T13:56:10.197"/>
+    <p1510:client id="{BB74DF13-67F5-D058-BF2F-914909AD0E2F}" v="118" dt="2026-10-26T11:55:41.913"/>
   </p1510:revLst>
 </p1510:revInfo>
 </file>
@@ -14270,33 +14270,15 @@
                                   </p:childTnLst>
                                 </p:cTn>
                               </p:par>
-                            </p:childTnLst>
-                          </p:cTn>
-                        </p:par>
-                      </p:childTnLst>
-                    </p:cTn>
-                  </p:par>
-                  <p:par>
-                    <p:cTn id="8" fill="hold">
-                      <p:stCondLst>
-                        <p:cond delay="indefinite"/>
-                      </p:stCondLst>
-                      <p:childTnLst>
-                        <p:par>
-                          <p:cTn id="9" fill="hold">
-                            <p:stCondLst>
-                              <p:cond delay="0"/>
-                            </p:stCondLst>
-                            <p:childTnLst>
                               <p:par>
-                                <p:cTn id="10" presetID="10" presetClass="entr" presetSubtype="0" fill="hold" grpId="0" nodeType="clickEffect">
+                                <p:cTn id="8" presetID="10" presetClass="entr" presetSubtype="0" fill="hold" grpId="0" nodeType="withEffect">
                                   <p:stCondLst>
                                     <p:cond delay="0"/>
                                   </p:stCondLst>
                                   <p:childTnLst>
                                     <p:set>
                                       <p:cBhvr>
-                                        <p:cTn id="11" dur="1" fill="hold">
+                                        <p:cTn id="9" dur="1" fill="hold">
                                           <p:stCondLst>
                                             <p:cond delay="0"/>
                                           </p:stCondLst>
@@ -14314,7 +14296,7 @@
                                     </p:set>
                                     <p:animEffect transition="in" filter="fade">
                                       <p:cBhvr>
-                                        <p:cTn id="12" dur="500"/>
+                                        <p:cTn id="10" dur="500"/>
                                         <p:tgtEl>
                                           <p:spTgt spid="2"/>
                                         </p:tgtEl>
@@ -15227,10 +15209,10 @@
           </a:lstStyle>
           <a:p>
             <a:r>
-              <a:rPr lang="en-US" dirty="0">
+              <a:rPr lang="en-US">
                 <a:cs typeface="Calibri"/>
               </a:rPr>
-              <a:t>Statistically different from zero</a:t>
+              <a:t>Significantly different from zero</a:t>
             </a:r>
           </a:p>
           <a:p>
@@ -16606,10 +16588,10 @@
           </a:lstStyle>
           <a:p>
             <a:r>
-              <a:rPr lang="en-US" dirty="0">
+              <a:rPr lang="en-US">
                 <a:cs typeface="Calibri"/>
               </a:rPr>
-              <a:t>Statistically different from zero</a:t>
+              <a:t>Significantly different from zero</a:t>
             </a:r>
           </a:p>
           <a:p>
@@ -32210,7 +32192,21 @@
                 <a:latin typeface="Calibri"/>
                 <a:cs typeface="Arial"/>
               </a:rPr>
-              <a:t>How compatible are these data with the null hypothesis of no difference in beak depths between 1976 and 1978?</a:t>
+              <a:t>How compatible are these data with the null hypothesis of </a:t>
+            </a:r>
+            <a:r>
+              <a:rPr lang="en-US" b="1" dirty="0">
+                <a:latin typeface="Calibri"/>
+                <a:cs typeface="Arial"/>
+              </a:rPr>
+              <a:t>no difference</a:t>
+            </a:r>
+            <a:r>
+              <a:rPr lang="en-US" dirty="0">
+                <a:latin typeface="Calibri"/>
+                <a:cs typeface="Arial"/>
+              </a:rPr>
+              <a:t> in beak depths between 1976 and 1978?</a:t>
             </a:r>
             <a:endParaRPr lang="en-US" dirty="0"/>
           </a:p>
